--- a/Lectures/Lecture0x2.pptx
+++ b/Lectures/Lecture0x2.pptx
@@ -341,7 +341,7 @@
           <a:p>
             <a:fld id="{9D7FC4FA-E705-46A8-8EEE-6A08CD8957E8}" type="datetimeFigureOut">
               <a:rPr lang="ru-RU" smtClean="0"/>
-              <a:t>10.12.2025</a:t>
+              <a:t>12.12.2025</a:t>
             </a:fld>
             <a:endParaRPr lang="ru-RU"/>
           </a:p>
@@ -737,7 +737,7 @@
           <a:p>
             <a:fld id="{0B19B25C-BEDF-4FE3-8236-6D02422B129B}" type="datetime1">
               <a:rPr lang="ru-RU" smtClean="0"/>
-              <a:t>10.12.2025</a:t>
+              <a:t>12.12.2025</a:t>
             </a:fld>
             <a:endParaRPr lang="ru-RU" dirty="0"/>
           </a:p>
@@ -905,7 +905,7 @@
           <a:p>
             <a:fld id="{EDF7BBEC-CF93-4F09-9013-BCE046C6D3BD}" type="datetime1">
               <a:rPr lang="ru-RU" smtClean="0"/>
-              <a:t>10.12.2025</a:t>
+              <a:t>12.12.2025</a:t>
             </a:fld>
             <a:endParaRPr lang="ru-RU" dirty="0"/>
           </a:p>
@@ -1083,7 +1083,7 @@
           <a:p>
             <a:fld id="{FF12B168-5755-4EA2-B249-E873796E479B}" type="datetime1">
               <a:rPr lang="ru-RU" smtClean="0"/>
-              <a:t>10.12.2025</a:t>
+              <a:t>12.12.2025</a:t>
             </a:fld>
             <a:endParaRPr lang="ru-RU" dirty="0"/>
           </a:p>
@@ -1251,7 +1251,7 @@
           <a:p>
             <a:fld id="{FD470AD4-56A6-4606-8501-F73980CB7599}" type="datetime1">
               <a:rPr lang="ru-RU" smtClean="0"/>
-              <a:t>10.12.2025</a:t>
+              <a:t>12.12.2025</a:t>
             </a:fld>
             <a:endParaRPr lang="ru-RU" dirty="0"/>
           </a:p>
@@ -1496,7 +1496,7 @@
           <a:p>
             <a:fld id="{AC88F67F-F86B-4606-8278-CB0C75A4F966}" type="datetime1">
               <a:rPr lang="ru-RU" smtClean="0"/>
-              <a:t>10.12.2025</a:t>
+              <a:t>12.12.2025</a:t>
             </a:fld>
             <a:endParaRPr lang="ru-RU" dirty="0"/>
           </a:p>
@@ -1725,7 +1725,7 @@
           <a:p>
             <a:fld id="{0FED0DCB-8D66-4EFD-964F-00FA4AC197A8}" type="datetime1">
               <a:rPr lang="ru-RU" smtClean="0"/>
-              <a:t>10.12.2025</a:t>
+              <a:t>12.12.2025</a:t>
             </a:fld>
             <a:endParaRPr lang="ru-RU" dirty="0"/>
           </a:p>
@@ -2089,7 +2089,7 @@
           <a:p>
             <a:fld id="{1FE1F39F-30AD-4136-B737-D56457711092}" type="datetime1">
               <a:rPr lang="ru-RU" smtClean="0"/>
-              <a:t>10.12.2025</a:t>
+              <a:t>12.12.2025</a:t>
             </a:fld>
             <a:endParaRPr lang="ru-RU" dirty="0"/>
           </a:p>
@@ -2206,7 +2206,7 @@
           <a:p>
             <a:fld id="{9F206297-E494-4E9C-8D47-5A3581230D54}" type="datetime1">
               <a:rPr lang="ru-RU" smtClean="0"/>
-              <a:t>10.12.2025</a:t>
+              <a:t>12.12.2025</a:t>
             </a:fld>
             <a:endParaRPr lang="ru-RU" dirty="0"/>
           </a:p>
@@ -2301,7 +2301,7 @@
           <a:p>
             <a:fld id="{ED34916B-0940-47D0-8C11-572ECD54A42D}" type="datetime1">
               <a:rPr lang="ru-RU" smtClean="0"/>
-              <a:t>10.12.2025</a:t>
+              <a:t>12.12.2025</a:t>
             </a:fld>
             <a:endParaRPr lang="ru-RU" dirty="0"/>
           </a:p>
@@ -2576,7 +2576,7 @@
           <a:p>
             <a:fld id="{054951E1-E8F4-4CBA-AD4B-76DA24EB61BE}" type="datetime1">
               <a:rPr lang="ru-RU" smtClean="0"/>
-              <a:t>10.12.2025</a:t>
+              <a:t>12.12.2025</a:t>
             </a:fld>
             <a:endParaRPr lang="ru-RU" dirty="0"/>
           </a:p>
@@ -2828,7 +2828,7 @@
           <a:p>
             <a:fld id="{9D2F990E-991C-49DB-8974-6384A72A05C0}" type="datetime1">
               <a:rPr lang="ru-RU" smtClean="0"/>
-              <a:t>10.12.2025</a:t>
+              <a:t>12.12.2025</a:t>
             </a:fld>
             <a:endParaRPr lang="ru-RU" dirty="0"/>
           </a:p>
@@ -3039,7 +3039,7 @@
           <a:p>
             <a:fld id="{5D585FBF-1A03-41ED-85AD-9DC45196266E}" type="datetime1">
               <a:rPr lang="ru-RU" smtClean="0"/>
-              <a:t>10.12.2025</a:t>
+              <a:t>12.12.2025</a:t>
             </a:fld>
             <a:endParaRPr lang="ru-RU" dirty="0"/>
           </a:p>
@@ -6071,8 +6071,8 @@
               <a:t>на стороне </a:t>
             </a:r>
             <a:r>
-              <a:rPr lang="en-US" dirty="0"/>
-              <a:t>B </a:t>
+              <a:rPr lang="en-US"/>
+              <a:t>A </a:t>
             </a:r>
             <a:endParaRPr lang="ru-RU" dirty="0"/>
           </a:p>
@@ -7655,8 +7655,8 @@
           </a:p>
         </p:txBody>
       </p:sp>
-      <mc:AlternateContent xmlns:mc="http://schemas.openxmlformats.org/markup-compatibility/2006">
-        <mc:Choice xmlns:a14="http://schemas.microsoft.com/office/drawing/2010/main" Requires="a14">
+      <mc:AlternateContent xmlns:mc="http://schemas.openxmlformats.org/markup-compatibility/2006" xmlns:a14="http://schemas.microsoft.com/office/drawing/2010/main">
+        <mc:Choice Requires="a14">
           <p:sp>
             <p:nvSpPr>
               <p:cNvPr id="3" name="Объект 2">
@@ -8118,7 +8118,7 @@
             </p:txBody>
           </p:sp>
         </mc:Choice>
-        <mc:Fallback>
+        <mc:Fallback xmlns="">
           <p:sp>
             <p:nvSpPr>
               <p:cNvPr id="3" name="Объект 2">
@@ -8250,8 +8250,8 @@
           </a:p>
         </p:txBody>
       </p:sp>
-      <mc:AlternateContent xmlns:mc="http://schemas.openxmlformats.org/markup-compatibility/2006">
-        <mc:Choice xmlns:a14="http://schemas.microsoft.com/office/drawing/2010/main" Requires="a14">
+      <mc:AlternateContent xmlns:mc="http://schemas.openxmlformats.org/markup-compatibility/2006" xmlns:a14="http://schemas.microsoft.com/office/drawing/2010/main">
+        <mc:Choice Requires="a14">
           <p:sp>
             <p:nvSpPr>
               <p:cNvPr id="3" name="Объект 2">
@@ -8373,7 +8373,7 @@
             </p:txBody>
           </p:sp>
         </mc:Choice>
-        <mc:Fallback>
+        <mc:Fallback xmlns="">
           <p:sp>
             <p:nvSpPr>
               <p:cNvPr id="3" name="Объект 2">

--- a/Lectures/Lecture0x2.pptx
+++ b/Lectures/Lecture0x2.pptx
@@ -341,7 +341,7 @@
           <a:p>
             <a:fld id="{9D7FC4FA-E705-46A8-8EEE-6A08CD8957E8}" type="datetimeFigureOut">
               <a:rPr lang="ru-RU" smtClean="0"/>
-              <a:t>12.12.2025</a:t>
+              <a:t>17.12.2025</a:t>
             </a:fld>
             <a:endParaRPr lang="ru-RU"/>
           </a:p>
@@ -737,7 +737,7 @@
           <a:p>
             <a:fld id="{0B19B25C-BEDF-4FE3-8236-6D02422B129B}" type="datetime1">
               <a:rPr lang="ru-RU" smtClean="0"/>
-              <a:t>12.12.2025</a:t>
+              <a:t>17.12.2025</a:t>
             </a:fld>
             <a:endParaRPr lang="ru-RU" dirty="0"/>
           </a:p>
@@ -905,7 +905,7 @@
           <a:p>
             <a:fld id="{EDF7BBEC-CF93-4F09-9013-BCE046C6D3BD}" type="datetime1">
               <a:rPr lang="ru-RU" smtClean="0"/>
-              <a:t>12.12.2025</a:t>
+              <a:t>17.12.2025</a:t>
             </a:fld>
             <a:endParaRPr lang="ru-RU" dirty="0"/>
           </a:p>
@@ -1083,7 +1083,7 @@
           <a:p>
             <a:fld id="{FF12B168-5755-4EA2-B249-E873796E479B}" type="datetime1">
               <a:rPr lang="ru-RU" smtClean="0"/>
-              <a:t>12.12.2025</a:t>
+              <a:t>17.12.2025</a:t>
             </a:fld>
             <a:endParaRPr lang="ru-RU" dirty="0"/>
           </a:p>
@@ -1251,7 +1251,7 @@
           <a:p>
             <a:fld id="{FD470AD4-56A6-4606-8501-F73980CB7599}" type="datetime1">
               <a:rPr lang="ru-RU" smtClean="0"/>
-              <a:t>12.12.2025</a:t>
+              <a:t>17.12.2025</a:t>
             </a:fld>
             <a:endParaRPr lang="ru-RU" dirty="0"/>
           </a:p>
@@ -1496,7 +1496,7 @@
           <a:p>
             <a:fld id="{AC88F67F-F86B-4606-8278-CB0C75A4F966}" type="datetime1">
               <a:rPr lang="ru-RU" smtClean="0"/>
-              <a:t>12.12.2025</a:t>
+              <a:t>17.12.2025</a:t>
             </a:fld>
             <a:endParaRPr lang="ru-RU" dirty="0"/>
           </a:p>
@@ -1725,7 +1725,7 @@
           <a:p>
             <a:fld id="{0FED0DCB-8D66-4EFD-964F-00FA4AC197A8}" type="datetime1">
               <a:rPr lang="ru-RU" smtClean="0"/>
-              <a:t>12.12.2025</a:t>
+              <a:t>17.12.2025</a:t>
             </a:fld>
             <a:endParaRPr lang="ru-RU" dirty="0"/>
           </a:p>
@@ -2089,7 +2089,7 @@
           <a:p>
             <a:fld id="{1FE1F39F-30AD-4136-B737-D56457711092}" type="datetime1">
               <a:rPr lang="ru-RU" smtClean="0"/>
-              <a:t>12.12.2025</a:t>
+              <a:t>17.12.2025</a:t>
             </a:fld>
             <a:endParaRPr lang="ru-RU" dirty="0"/>
           </a:p>
@@ -2206,7 +2206,7 @@
           <a:p>
             <a:fld id="{9F206297-E494-4E9C-8D47-5A3581230D54}" type="datetime1">
               <a:rPr lang="ru-RU" smtClean="0"/>
-              <a:t>12.12.2025</a:t>
+              <a:t>17.12.2025</a:t>
             </a:fld>
             <a:endParaRPr lang="ru-RU" dirty="0"/>
           </a:p>
@@ -2301,7 +2301,7 @@
           <a:p>
             <a:fld id="{ED34916B-0940-47D0-8C11-572ECD54A42D}" type="datetime1">
               <a:rPr lang="ru-RU" smtClean="0"/>
-              <a:t>12.12.2025</a:t>
+              <a:t>17.12.2025</a:t>
             </a:fld>
             <a:endParaRPr lang="ru-RU" dirty="0"/>
           </a:p>
@@ -2576,7 +2576,7 @@
           <a:p>
             <a:fld id="{054951E1-E8F4-4CBA-AD4B-76DA24EB61BE}" type="datetime1">
               <a:rPr lang="ru-RU" smtClean="0"/>
-              <a:t>12.12.2025</a:t>
+              <a:t>17.12.2025</a:t>
             </a:fld>
             <a:endParaRPr lang="ru-RU" dirty="0"/>
           </a:p>
@@ -2828,7 +2828,7 @@
           <a:p>
             <a:fld id="{9D2F990E-991C-49DB-8974-6384A72A05C0}" type="datetime1">
               <a:rPr lang="ru-RU" smtClean="0"/>
-              <a:t>12.12.2025</a:t>
+              <a:t>17.12.2025</a:t>
             </a:fld>
             <a:endParaRPr lang="ru-RU" dirty="0"/>
           </a:p>
@@ -3039,7 +3039,7 @@
           <a:p>
             <a:fld id="{5D585FBF-1A03-41ED-85AD-9DC45196266E}" type="datetime1">
               <a:rPr lang="ru-RU" smtClean="0"/>
-              <a:t>12.12.2025</a:t>
+              <a:t>17.12.2025</a:t>
             </a:fld>
             <a:endParaRPr lang="ru-RU" dirty="0"/>
           </a:p>
@@ -11504,11 +11504,11 @@
             </a:pPr>
             <a:r>
               <a:rPr lang="ru-RU" dirty="0"/>
-              <a:t>Пакет с </a:t>
-            </a:r>
-            <a:r>
-              <a:rPr lang="en-US" dirty="0"/>
-              <a:t>PT </a:t>
+              <a:t>Пакет с ОТ</a:t>
+            </a:r>
+            <a:r>
+              <a:rPr lang="en-US" dirty="0"/>
+              <a:t> </a:t>
             </a:r>
             <a:r>
               <a:rPr lang="ru-RU" dirty="0"/>
@@ -12423,124 +12423,347 @@
           </a:p>
         </p:txBody>
       </p:sp>
-      <p:sp>
-        <p:nvSpPr>
-          <p:cNvPr id="3" name="Объект 2"/>
-          <p:cNvSpPr>
-            <a:spLocks noGrp="1"/>
-          </p:cNvSpPr>
-          <p:nvPr>
-            <p:ph idx="1"/>
-          </p:nvPr>
-        </p:nvSpPr>
-        <p:spPr>
-          <a:xfrm>
-            <a:off x="838200" y="1816833"/>
-            <a:ext cx="10515600" cy="4351338"/>
-          </a:xfrm>
-        </p:spPr>
-        <p:txBody>
-          <a:bodyPr/>
-          <a:lstStyle/>
-          <a:p>
-            <a:pPr marL="0" indent="0">
-              <a:buNone/>
-            </a:pPr>
-            <a:r>
-              <a:rPr lang="ru-RU" dirty="0"/>
-              <a:t>Получатель хранит секретное случайное значение, изменяемое каждые 2 минуты. </a:t>
-            </a:r>
-            <a:r>
-              <a:rPr lang="en-US" dirty="0"/>
-              <a:t>Cookie – </a:t>
-            </a:r>
-            <a:r>
-              <a:rPr lang="ru-RU" dirty="0"/>
-              <a:t>есть </a:t>
-            </a:r>
-            <a:r>
-              <a:rPr lang="en-US" dirty="0"/>
-              <a:t>MAC </a:t>
-            </a:r>
-            <a:r>
-              <a:rPr lang="ru-RU" dirty="0"/>
-              <a:t>от </a:t>
-            </a:r>
-            <a:r>
-              <a:rPr lang="en-US" dirty="0"/>
-              <a:t>Ip </a:t>
-            </a:r>
-            <a:r>
-              <a:rPr lang="ru-RU" dirty="0"/>
-              <a:t>инициатора, с использованием секретного значения в качестве ключа.</a:t>
-            </a:r>
-            <a:r>
-              <a:rPr lang="en-US" dirty="0"/>
-              <a:t> </a:t>
-            </a:r>
-            <a:endParaRPr lang="ru-RU" dirty="0"/>
-          </a:p>
-          <a:p>
-            <a:pPr marL="0" indent="0">
-              <a:buNone/>
-            </a:pPr>
-            <a:r>
-              <a:rPr lang="ru-RU" dirty="0"/>
-              <a:t>Инициатор при получении </a:t>
-            </a:r>
-            <a:r>
-              <a:rPr lang="en-US" dirty="0"/>
-              <a:t>cookie </a:t>
-            </a:r>
-            <a:r>
-              <a:rPr lang="ru-RU" dirty="0"/>
-              <a:t>использует его в качестве ключа для вычисления </a:t>
-            </a:r>
-            <a:r>
-              <a:rPr lang="en-US" dirty="0"/>
-              <a:t>MAC </a:t>
-            </a:r>
-            <a:r>
-              <a:rPr lang="ru-RU" dirty="0"/>
-              <a:t>от собственного запроса.</a:t>
-            </a:r>
-          </a:p>
-          <a:p>
-            <a:pPr marL="0" indent="0">
-              <a:buNone/>
-            </a:pPr>
-            <a:r>
-              <a:rPr lang="ru-RU" dirty="0"/>
-              <a:t>Получатель проверяет </a:t>
-            </a:r>
-            <a:r>
-              <a:rPr lang="en-US" dirty="0"/>
-              <a:t>MAC </a:t>
-            </a:r>
-            <a:r>
-              <a:rPr lang="ru-RU" dirty="0"/>
-              <a:t>от запроса пользователя.</a:t>
-            </a:r>
-          </a:p>
-          <a:p>
-            <a:pPr marL="0" indent="0">
-              <a:buNone/>
-            </a:pPr>
-            <a:r>
-              <a:rPr lang="ru-RU" dirty="0"/>
-              <a:t>Цель – привязка источника сообщений к его адресу. Количество сообщений с фиксированного </a:t>
-            </a:r>
-            <a:r>
-              <a:rPr lang="en-US" dirty="0"/>
-              <a:t>Ip </a:t>
-            </a:r>
-            <a:r>
-              <a:rPr lang="ru-RU" dirty="0"/>
-              <a:t>можно ограничивать стандартными средствами.</a:t>
-            </a:r>
-          </a:p>
-        </p:txBody>
-      </p:sp>
+      <mc:AlternateContent xmlns:mc="http://schemas.openxmlformats.org/markup-compatibility/2006">
+        <mc:Choice xmlns:a14="http://schemas.microsoft.com/office/drawing/2010/main" Requires="a14">
+          <p:sp>
+            <p:nvSpPr>
+              <p:cNvPr id="3" name="Объект 2"/>
+              <p:cNvSpPr>
+                <a:spLocks noGrp="1"/>
+              </p:cNvSpPr>
+              <p:nvPr>
+                <p:ph idx="1"/>
+              </p:nvPr>
+            </p:nvSpPr>
+            <p:spPr>
+              <a:xfrm>
+                <a:off x="838200" y="1816833"/>
+                <a:ext cx="10515600" cy="4351338"/>
+              </a:xfrm>
+            </p:spPr>
+            <p:txBody>
+              <a:bodyPr>
+                <a:normAutofit lnSpcReduction="10000"/>
+              </a:bodyPr>
+              <a:lstStyle/>
+              <a:p>
+                <a:pPr marL="0" indent="0">
+                  <a:buNone/>
+                </a:pPr>
+                <a:r>
+                  <a:rPr lang="ru-RU" dirty="0"/>
+                  <a:t>Получатель (целевой узел) хранит секретное случайное значение </a:t>
+                </a:r>
+                <a14:m>
+                  <m:oMath xmlns:m="http://schemas.openxmlformats.org/officeDocument/2006/math">
+                    <m:r>
+                      <a:rPr lang="en-US" b="0" i="1" smtClean="0">
+                        <a:latin typeface="Cambria Math" panose="02040503050406030204" pitchFamily="18" charset="0"/>
+                      </a:rPr>
+                      <m:t>𝑠</m:t>
+                    </m:r>
+                  </m:oMath>
+                </a14:m>
+                <a:r>
+                  <a:rPr lang="ru-RU" dirty="0"/>
+                  <a:t>, изменяемое каждые 2 минуты. </a:t>
+                </a:r>
+                <a:r>
+                  <a:rPr lang="en-US" dirty="0"/>
+                  <a:t>Cookie – </a:t>
+                </a:r>
+                <a:r>
+                  <a:rPr lang="ru-RU" dirty="0"/>
+                  <a:t>есть </a:t>
+                </a:r>
+                <a:r>
+                  <a:rPr lang="en-US" dirty="0"/>
+                  <a:t>MAC </a:t>
+                </a:r>
+                <a:r>
+                  <a:rPr lang="ru-RU" dirty="0"/>
+                  <a:t>от </a:t>
+                </a:r>
+                <a:r>
+                  <a:rPr lang="en-US" dirty="0"/>
+                  <a:t>IP </a:t>
+                </a:r>
+                <a:r>
+                  <a:rPr lang="ru-RU" dirty="0"/>
+                  <a:t>инициатора, с использованием секретного значения в качестве ключа</a:t>
+                </a:r>
+                <a:r>
+                  <a:rPr lang="en-US" dirty="0"/>
+                  <a:t> (</a:t>
+                </a:r>
+                <a14:m>
+                  <m:oMath xmlns:m="http://schemas.openxmlformats.org/officeDocument/2006/math">
+                    <m:r>
+                      <a:rPr lang="ru-RU" b="0" i="1" smtClean="0">
+                        <a:latin typeface="Cambria Math" panose="02040503050406030204" pitchFamily="18" charset="0"/>
+                      </a:rPr>
+                      <m:t>с=</m:t>
+                    </m:r>
+                    <m:r>
+                      <a:rPr lang="en-US" b="0" i="1" smtClean="0">
+                        <a:latin typeface="Cambria Math" panose="02040503050406030204" pitchFamily="18" charset="0"/>
+                      </a:rPr>
+                      <m:t>𝑀𝐴𝐶</m:t>
+                    </m:r>
+                    <m:r>
+                      <a:rPr lang="en-US" b="0" i="1" smtClean="0">
+                        <a:latin typeface="Cambria Math" panose="02040503050406030204" pitchFamily="18" charset="0"/>
+                      </a:rPr>
+                      <m:t>(</m:t>
+                    </m:r>
+                    <m:r>
+                      <a:rPr lang="en-US" b="0" i="1" smtClean="0">
+                        <a:latin typeface="Cambria Math" panose="02040503050406030204" pitchFamily="18" charset="0"/>
+                      </a:rPr>
+                      <m:t>𝑠</m:t>
+                    </m:r>
+                    <m:r>
+                      <a:rPr lang="en-US" b="0" i="1" smtClean="0">
+                        <a:latin typeface="Cambria Math" panose="02040503050406030204" pitchFamily="18" charset="0"/>
+                      </a:rPr>
+                      <m:t>,</m:t>
+                    </m:r>
+                    <m:r>
+                      <a:rPr lang="en-US" b="0" i="1" smtClean="0">
+                        <a:latin typeface="Cambria Math" panose="02040503050406030204" pitchFamily="18" charset="0"/>
+                      </a:rPr>
+                      <m:t>𝐼𝑃</m:t>
+                    </m:r>
+                    <m:r>
+                      <a:rPr lang="en-US" b="0" i="1" smtClean="0">
+                        <a:latin typeface="Cambria Math" panose="02040503050406030204" pitchFamily="18" charset="0"/>
+                      </a:rPr>
+                      <m:t>)</m:t>
+                    </m:r>
+                  </m:oMath>
+                </a14:m>
+                <a:r>
+                  <a:rPr lang="ru-RU" dirty="0"/>
+                  <a:t>.</a:t>
+                </a:r>
+                <a:r>
+                  <a:rPr lang="en-US" dirty="0"/>
+                  <a:t> </a:t>
+                </a:r>
+                <a:endParaRPr lang="ru-RU" dirty="0"/>
+              </a:p>
+              <a:p>
+                <a:pPr marL="0" indent="0">
+                  <a:buNone/>
+                </a:pPr>
+                <a:r>
+                  <a:rPr lang="ru-RU" dirty="0"/>
+                  <a:t>Инициатор при получении </a:t>
+                </a:r>
+                <a:r>
+                  <a:rPr lang="en-US" dirty="0"/>
+                  <a:t>cookie </a:t>
+                </a:r>
+                <a:r>
+                  <a:rPr lang="ru-RU" dirty="0"/>
+                  <a:t>использует его в качестве ключа для вычисления </a:t>
+                </a:r>
+                <a:r>
+                  <a:rPr lang="en-US" dirty="0"/>
+                  <a:t>MAC </a:t>
+                </a:r>
+                <a:r>
+                  <a:rPr lang="ru-RU" dirty="0"/>
+                  <a:t>от собственного запроса</a:t>
+                </a:r>
+                <a:r>
+                  <a:rPr lang="en-US" dirty="0"/>
+                  <a:t> </a:t>
+                </a:r>
+                <a14:m>
+                  <m:oMath xmlns:m="http://schemas.openxmlformats.org/officeDocument/2006/math">
+                    <m:sSub>
+                      <m:sSubPr>
+                        <m:ctrlPr>
+                          <a:rPr lang="en-US" b="0" i="1" smtClean="0">
+                            <a:latin typeface="Cambria Math" panose="02040503050406030204" pitchFamily="18" charset="0"/>
+                          </a:rPr>
+                        </m:ctrlPr>
+                      </m:sSubPr>
+                      <m:e>
+                        <m:r>
+                          <a:rPr lang="en-US" b="0" i="1" smtClean="0">
+                            <a:latin typeface="Cambria Math" panose="02040503050406030204" pitchFamily="18" charset="0"/>
+                          </a:rPr>
+                          <m:t>𝑐</m:t>
+                        </m:r>
+                      </m:e>
+                      <m:sub>
+                        <m:r>
+                          <a:rPr lang="en-US" b="0" i="1" smtClean="0">
+                            <a:latin typeface="Cambria Math" panose="02040503050406030204" pitchFamily="18" charset="0"/>
+                          </a:rPr>
+                          <m:t>𝑟</m:t>
+                        </m:r>
+                      </m:sub>
+                    </m:sSub>
+                    <m:r>
+                      <a:rPr lang="en-US" b="0" i="1" smtClean="0">
+                        <a:latin typeface="Cambria Math" panose="02040503050406030204" pitchFamily="18" charset="0"/>
+                      </a:rPr>
+                      <m:t>=</m:t>
+                    </m:r>
+                    <m:r>
+                      <a:rPr lang="en-US" b="0" i="1" smtClean="0">
+                        <a:latin typeface="Cambria Math" panose="02040503050406030204" pitchFamily="18" charset="0"/>
+                      </a:rPr>
+                      <m:t>𝑀𝐴𝐶</m:t>
+                    </m:r>
+                    <m:r>
+                      <a:rPr lang="en-US" b="0" i="1" smtClean="0">
+                        <a:latin typeface="Cambria Math" panose="02040503050406030204" pitchFamily="18" charset="0"/>
+                      </a:rPr>
+                      <m:t>(</m:t>
+                    </m:r>
+                    <m:r>
+                      <a:rPr lang="en-US" b="0" i="1" smtClean="0">
+                        <a:latin typeface="Cambria Math" panose="02040503050406030204" pitchFamily="18" charset="0"/>
+                      </a:rPr>
+                      <m:t>𝑐</m:t>
+                    </m:r>
+                    <m:r>
+                      <a:rPr lang="en-US" b="0" i="1" smtClean="0">
+                        <a:latin typeface="Cambria Math" panose="02040503050406030204" pitchFamily="18" charset="0"/>
+                      </a:rPr>
+                      <m:t>,</m:t>
+                    </m:r>
+                    <m:r>
+                      <a:rPr lang="en-US" b="0" i="1" smtClean="0">
+                        <a:latin typeface="Cambria Math" panose="02040503050406030204" pitchFamily="18" charset="0"/>
+                      </a:rPr>
+                      <m:t>𝑟𝑒𝑞𝑢𝑒𝑠𝑡</m:t>
+                    </m:r>
+                    <m:r>
+                      <a:rPr lang="en-US" b="0" i="1" smtClean="0">
+                        <a:latin typeface="Cambria Math" panose="02040503050406030204" pitchFamily="18" charset="0"/>
+                      </a:rPr>
+                      <m:t>)</m:t>
+                    </m:r>
+                  </m:oMath>
+                </a14:m>
+                <a:r>
+                  <a:rPr lang="ru-RU" dirty="0"/>
+                  <a:t>.</a:t>
+                </a:r>
+              </a:p>
+              <a:p>
+                <a:pPr marL="0" indent="0">
+                  <a:buNone/>
+                </a:pPr>
+                <a:r>
+                  <a:rPr lang="ru-RU" dirty="0"/>
+                  <a:t>Получатель проверяет </a:t>
+                </a:r>
+                <a:r>
+                  <a:rPr lang="en-US" dirty="0"/>
+                  <a:t>MAC </a:t>
+                </a:r>
+                <a14:m>
+                  <m:oMath xmlns:m="http://schemas.openxmlformats.org/officeDocument/2006/math">
+                    <m:sSub>
+                      <m:sSubPr>
+                        <m:ctrlPr>
+                          <a:rPr lang="en-US" i="1">
+                            <a:latin typeface="Cambria Math" panose="02040503050406030204" pitchFamily="18" charset="0"/>
+                          </a:rPr>
+                        </m:ctrlPr>
+                      </m:sSubPr>
+                      <m:e>
+                        <m:r>
+                          <a:rPr lang="en-US" i="1">
+                            <a:latin typeface="Cambria Math" panose="02040503050406030204" pitchFamily="18" charset="0"/>
+                          </a:rPr>
+                          <m:t>𝑐</m:t>
+                        </m:r>
+                      </m:e>
+                      <m:sub>
+                        <m:r>
+                          <a:rPr lang="en-US" i="1">
+                            <a:latin typeface="Cambria Math" panose="02040503050406030204" pitchFamily="18" charset="0"/>
+                          </a:rPr>
+                          <m:t>𝑟</m:t>
+                        </m:r>
+                      </m:sub>
+                    </m:sSub>
+                  </m:oMath>
+                </a14:m>
+                <a:r>
+                  <a:rPr lang="en-US" dirty="0"/>
+                  <a:t> </a:t>
+                </a:r>
+                <a:r>
+                  <a:rPr lang="ru-RU" dirty="0"/>
+                  <a:t>от запроса пользователя.</a:t>
+                </a:r>
+              </a:p>
+              <a:p>
+                <a:pPr marL="0" indent="0">
+                  <a:buNone/>
+                </a:pPr>
+                <a:r>
+                  <a:rPr lang="ru-RU" dirty="0"/>
+                  <a:t>Цель – привязка источника сообщений к его адресу. Количество сообщений с фиксированного </a:t>
+                </a:r>
+                <a:r>
+                  <a:rPr lang="en-US" dirty="0"/>
+                  <a:t>IP </a:t>
+                </a:r>
+                <a:r>
+                  <a:rPr lang="ru-RU" dirty="0"/>
+                  <a:t>можно ограничивать стандартными средствами.</a:t>
+                </a:r>
+              </a:p>
+            </p:txBody>
+          </p:sp>
+        </mc:Choice>
+        <mc:Fallback>
+          <p:sp>
+            <p:nvSpPr>
+              <p:cNvPr id="3" name="Объект 2"/>
+              <p:cNvSpPr>
+                <a:spLocks noGrp="1" noRot="1" noChangeAspect="1" noMove="1" noResize="1" noEditPoints="1" noAdjustHandles="1" noChangeArrowheads="1" noChangeShapeType="1" noTextEdit="1"/>
+              </p:cNvSpPr>
+              <p:nvPr>
+                <p:ph idx="1"/>
+              </p:nvPr>
+            </p:nvSpPr>
+            <p:spPr>
+              <a:xfrm>
+                <a:off x="838200" y="1816833"/>
+                <a:ext cx="10515600" cy="4351338"/>
+              </a:xfrm>
+              <a:blipFill>
+                <a:blip r:embed="rId2"/>
+                <a:stretch>
+                  <a:fillRect l="-1217" t="-3081" r="-1623" b="-1401"/>
+                </a:stretch>
+              </a:blipFill>
+            </p:spPr>
+            <p:txBody>
+              <a:bodyPr/>
+              <a:lstStyle/>
+              <a:p>
+                <a:r>
+                  <a:rPr lang="ru-RU">
+                    <a:noFill/>
+                  </a:rPr>
+                  <a:t> </a:t>
+                </a:r>
+              </a:p>
+            </p:txBody>
+          </p:sp>
+        </mc:Fallback>
+      </mc:AlternateContent>
       <p:sp>
         <p:nvSpPr>
           <p:cNvPr id="4" name="Номер слайда 3"/>
@@ -12847,7 +13070,7 @@
             </a:r>
             <a:r>
               <a:rPr lang="en-US" dirty="0"/>
-              <a:t>mac </a:t>
+              <a:t>MAC </a:t>
             </a:r>
             <a:endParaRPr lang="ru-RU" dirty="0"/>
           </a:p>
@@ -12857,13 +13080,16 @@
             </a:pPr>
             <a:r>
               <a:rPr lang="ru-RU" dirty="0"/>
-              <a:t>В качестве ответов на </a:t>
+              <a:t>в качестве ответов на </a:t>
             </a:r>
             <a:r>
               <a:rPr lang="en-US" dirty="0"/>
               <a:t>cookie</a:t>
             </a:r>
-            <a:endParaRPr lang="ru-RU" dirty="0"/>
+            <a:r>
+              <a:rPr lang="ru-RU" dirty="0"/>
+              <a:t>-запросы</a:t>
+            </a:r>
           </a:p>
         </p:txBody>
       </p:sp>
@@ -13212,7 +13438,24 @@
             </a:r>
             <a:r>
               <a:rPr lang="ru-RU" dirty="0"/>
-              <a:t> всегда, даже без нагрузки. Цель – узел должен знать с кем он общается (нет атак «из вне» от сторонних систем).</a:t>
+              <a:t> всегда, даже без нагрузки. </a:t>
+            </a:r>
+          </a:p>
+          <a:p>
+            <a:pPr marL="0" indent="0">
+              <a:buNone/>
+            </a:pPr>
+            <a:r>
+              <a:rPr lang="ru-RU" dirty="0"/>
+              <a:t>Цель – инициатор должен знать с кем он общается и какой у него </a:t>
+            </a:r>
+            <a:r>
+              <a:rPr lang="en-US" dirty="0"/>
+              <a:t>PK</a:t>
+            </a:r>
+            <a:r>
+              <a:rPr lang="ru-RU" dirty="0"/>
+              <a:t> (нет атак «из вне» от сторонних систем).</a:t>
             </a:r>
           </a:p>
           <a:p>
@@ -13504,7 +13747,15 @@
             </a:r>
             <a:r>
               <a:rPr lang="en-US" dirty="0"/>
-              <a:t>cookie </a:t>
+              <a:t>cookie</a:t>
+            </a:r>
+            <a:r>
+              <a:rPr lang="ru-RU" dirty="0"/>
+              <a:t>-запрос</a:t>
+            </a:r>
+            <a:r>
+              <a:rPr lang="en-US" dirty="0"/>
+              <a:t> </a:t>
             </a:r>
             <a:r>
               <a:rPr lang="ru-RU" dirty="0"/>
@@ -13720,7 +13971,7 @@
             </a:r>
             <a:r>
               <a:rPr lang="ru-RU" dirty="0"/>
-              <a:t>в первом сообщение, если под нагрузкой отправляет зашифрованную </a:t>
+              <a:t>в первом сообщении, если под нагрузкой отправляет зашифрованную </a:t>
             </a:r>
             <a:r>
               <a:rPr lang="en-US" dirty="0"/>
@@ -14101,6 +14352,179 @@
           </a:p>
         </p:txBody>
       </p:sp>
+      <mc:AlternateContent xmlns:mc="http://schemas.openxmlformats.org/markup-compatibility/2006">
+        <mc:Choice xmlns:a14="http://schemas.microsoft.com/office/drawing/2010/main" Requires="a14">
+          <p:sp>
+            <p:nvSpPr>
+              <p:cNvPr id="8" name="TextBox 7">
+                <a:extLst>
+                  <a:ext uri="{FF2B5EF4-FFF2-40B4-BE49-F238E27FC236}">
+                    <a16:creationId xmlns:a16="http://schemas.microsoft.com/office/drawing/2014/main" id="{67C914F7-616B-4598-94D8-D698C133DCC4}"/>
+                  </a:ext>
+                </a:extLst>
+              </p:cNvPr>
+              <p:cNvSpPr txBox="1"/>
+              <p:nvPr/>
+            </p:nvSpPr>
+            <p:spPr>
+              <a:xfrm>
+                <a:off x="148525" y="6213288"/>
+                <a:ext cx="7181390" cy="654666"/>
+              </a:xfrm>
+              <a:prstGeom prst="rect">
+                <a:avLst/>
+              </a:prstGeom>
+              <a:noFill/>
+            </p:spPr>
+            <p:txBody>
+              <a:bodyPr wrap="none" rtlCol="0">
+                <a:spAutoFit/>
+              </a:bodyPr>
+              <a:lstStyle/>
+              <a:p>
+                <a14:m>
+                  <m:oMath xmlns:m="http://schemas.openxmlformats.org/officeDocument/2006/math">
+                    <m:sSub>
+                      <m:sSubPr>
+                        <m:ctrlPr>
+                          <a:rPr lang="en-US" b="0" i="1" smtClean="0">
+                            <a:latin typeface="Cambria Math" panose="02040503050406030204" pitchFamily="18" charset="0"/>
+                          </a:rPr>
+                        </m:ctrlPr>
+                      </m:sSubPr>
+                      <m:e>
+                        <m:r>
+                          <a:rPr lang="en-US" b="0" i="1" smtClean="0">
+                            <a:latin typeface="Cambria Math" panose="02040503050406030204" pitchFamily="18" charset="0"/>
+                          </a:rPr>
+                          <m:t>𝐿</m:t>
+                        </m:r>
+                      </m:e>
+                      <m:sub>
+                        <m:r>
+                          <a:rPr lang="en-US" b="0" i="1" smtClean="0">
+                            <a:latin typeface="Cambria Math" panose="02040503050406030204" pitchFamily="18" charset="0"/>
+                          </a:rPr>
+                          <m:t>𝑚</m:t>
+                        </m:r>
+                      </m:sub>
+                    </m:sSub>
+                  </m:oMath>
+                </a14:m>
+                <a:r>
+                  <a:rPr lang="ru-RU" dirty="0"/>
+                  <a:t> – последняя полученная инициатором </a:t>
+                </a:r>
+                <a:r>
+                  <a:rPr lang="en-US" dirty="0"/>
+                  <a:t>cookie</a:t>
+                </a:r>
+                <a:br>
+                  <a:rPr lang="en-US" dirty="0"/>
+                </a:br>
+                <a14:m>
+                  <m:oMath xmlns:m="http://schemas.openxmlformats.org/officeDocument/2006/math">
+                    <m:acc>
+                      <m:accPr>
+                        <m:chr m:val="̃"/>
+                        <m:ctrlPr>
+                          <a:rPr lang="en-US" i="1" smtClean="0">
+                            <a:latin typeface="Cambria Math" panose="02040503050406030204" pitchFamily="18" charset="0"/>
+                          </a:rPr>
+                        </m:ctrlPr>
+                      </m:accPr>
+                      <m:e>
+                        <m:sSub>
+                          <m:sSubPr>
+                            <m:ctrlPr>
+                              <a:rPr lang="en-US" i="1">
+                                <a:latin typeface="Cambria Math" panose="02040503050406030204" pitchFamily="18" charset="0"/>
+                              </a:rPr>
+                            </m:ctrlPr>
+                          </m:sSubPr>
+                          <m:e>
+                            <m:r>
+                              <a:rPr lang="en-US" i="1">
+                                <a:latin typeface="Cambria Math" panose="02040503050406030204" pitchFamily="18" charset="0"/>
+                              </a:rPr>
+                              <m:t>𝐿</m:t>
+                            </m:r>
+                          </m:e>
+                          <m:sub>
+                            <m:r>
+                              <a:rPr lang="en-US" i="1">
+                                <a:latin typeface="Cambria Math" panose="02040503050406030204" pitchFamily="18" charset="0"/>
+                              </a:rPr>
+                              <m:t>𝑚</m:t>
+                            </m:r>
+                          </m:sub>
+                        </m:sSub>
+                      </m:e>
+                    </m:acc>
+                  </m:oMath>
+                </a14:m>
+                <a:r>
+                  <a:rPr lang="ru-RU" dirty="0"/>
+                  <a:t> – время с момента получения последней </a:t>
+                </a:r>
+                <a:r>
+                  <a:rPr lang="en-US" dirty="0"/>
+                  <a:t>cookie </a:t>
+                </a:r>
+                <a:r>
+                  <a:rPr lang="ru-RU" dirty="0"/>
+                  <a:t>инициатором (сек)</a:t>
+                </a:r>
+                <a:endParaRPr lang="en-US" dirty="0"/>
+              </a:p>
+            </p:txBody>
+          </p:sp>
+        </mc:Choice>
+        <mc:Fallback>
+          <p:sp>
+            <p:nvSpPr>
+              <p:cNvPr id="8" name="TextBox 7">
+                <a:extLst>
+                  <a:ext uri="{FF2B5EF4-FFF2-40B4-BE49-F238E27FC236}">
+                    <a16:creationId xmlns:a16="http://schemas.microsoft.com/office/drawing/2014/main" id="{67C914F7-616B-4598-94D8-D698C133DCC4}"/>
+                  </a:ext>
+                </a:extLst>
+              </p:cNvPr>
+              <p:cNvSpPr txBox="1">
+                <a:spLocks noRot="1" noChangeAspect="1" noMove="1" noResize="1" noEditPoints="1" noAdjustHandles="1" noChangeArrowheads="1" noChangeShapeType="1" noTextEdit="1"/>
+              </p:cNvSpPr>
+              <p:nvPr/>
+            </p:nvSpPr>
+            <p:spPr>
+              <a:xfrm>
+                <a:off x="148525" y="6213288"/>
+                <a:ext cx="7181390" cy="654666"/>
+              </a:xfrm>
+              <a:prstGeom prst="rect">
+                <a:avLst/>
+              </a:prstGeom>
+              <a:blipFill>
+                <a:blip r:embed="rId5"/>
+                <a:stretch>
+                  <a:fillRect t="-4630" b="-13889"/>
+                </a:stretch>
+              </a:blipFill>
+            </p:spPr>
+            <p:txBody>
+              <a:bodyPr/>
+              <a:lstStyle/>
+              <a:p>
+                <a:r>
+                  <a:rPr lang="ru-RU">
+                    <a:noFill/>
+                  </a:rPr>
+                  <a:t> </a:t>
+                </a:r>
+              </a:p>
+            </p:txBody>
+          </p:sp>
+        </mc:Fallback>
+      </mc:AlternateContent>
     </p:spTree>
     <p:extLst>
       <p:ext uri="{BB962C8B-B14F-4D97-AF65-F5344CB8AC3E}">
@@ -14267,6 +14691,179 @@
           </a:p>
         </p:txBody>
       </p:sp>
+      <mc:AlternateContent xmlns:mc="http://schemas.openxmlformats.org/markup-compatibility/2006">
+        <mc:Choice xmlns:a14="http://schemas.microsoft.com/office/drawing/2010/main" Requires="a14">
+          <p:sp>
+            <p:nvSpPr>
+              <p:cNvPr id="8" name="TextBox 7">
+                <a:extLst>
+                  <a:ext uri="{FF2B5EF4-FFF2-40B4-BE49-F238E27FC236}">
+                    <a16:creationId xmlns:a16="http://schemas.microsoft.com/office/drawing/2014/main" id="{5AE57290-8DC5-4A61-9F1C-6C50C2F87555}"/>
+                  </a:ext>
+                </a:extLst>
+              </p:cNvPr>
+              <p:cNvSpPr txBox="1"/>
+              <p:nvPr/>
+            </p:nvSpPr>
+            <p:spPr>
+              <a:xfrm>
+                <a:off x="148525" y="6213288"/>
+                <a:ext cx="7181390" cy="654666"/>
+              </a:xfrm>
+              <a:prstGeom prst="rect">
+                <a:avLst/>
+              </a:prstGeom>
+              <a:noFill/>
+            </p:spPr>
+            <p:txBody>
+              <a:bodyPr wrap="none" rtlCol="0">
+                <a:spAutoFit/>
+              </a:bodyPr>
+              <a:lstStyle/>
+              <a:p>
+                <a14:m>
+                  <m:oMath xmlns:m="http://schemas.openxmlformats.org/officeDocument/2006/math">
+                    <m:sSub>
+                      <m:sSubPr>
+                        <m:ctrlPr>
+                          <a:rPr lang="en-US" b="0" i="1" smtClean="0">
+                            <a:latin typeface="Cambria Math" panose="02040503050406030204" pitchFamily="18" charset="0"/>
+                          </a:rPr>
+                        </m:ctrlPr>
+                      </m:sSubPr>
+                      <m:e>
+                        <m:r>
+                          <a:rPr lang="en-US" b="0" i="1" smtClean="0">
+                            <a:latin typeface="Cambria Math" panose="02040503050406030204" pitchFamily="18" charset="0"/>
+                          </a:rPr>
+                          <m:t>𝐿</m:t>
+                        </m:r>
+                      </m:e>
+                      <m:sub>
+                        <m:r>
+                          <a:rPr lang="en-US" b="0" i="1" smtClean="0">
+                            <a:latin typeface="Cambria Math" panose="02040503050406030204" pitchFamily="18" charset="0"/>
+                          </a:rPr>
+                          <m:t>𝑚</m:t>
+                        </m:r>
+                      </m:sub>
+                    </m:sSub>
+                  </m:oMath>
+                </a14:m>
+                <a:r>
+                  <a:rPr lang="ru-RU" dirty="0"/>
+                  <a:t> – последняя полученная инициатором </a:t>
+                </a:r>
+                <a:r>
+                  <a:rPr lang="en-US" dirty="0"/>
+                  <a:t>cookie</a:t>
+                </a:r>
+                <a:br>
+                  <a:rPr lang="en-US" dirty="0"/>
+                </a:br>
+                <a14:m>
+                  <m:oMath xmlns:m="http://schemas.openxmlformats.org/officeDocument/2006/math">
+                    <m:acc>
+                      <m:accPr>
+                        <m:chr m:val="̃"/>
+                        <m:ctrlPr>
+                          <a:rPr lang="en-US" i="1" smtClean="0">
+                            <a:latin typeface="Cambria Math" panose="02040503050406030204" pitchFamily="18" charset="0"/>
+                          </a:rPr>
+                        </m:ctrlPr>
+                      </m:accPr>
+                      <m:e>
+                        <m:sSub>
+                          <m:sSubPr>
+                            <m:ctrlPr>
+                              <a:rPr lang="en-US" i="1">
+                                <a:latin typeface="Cambria Math" panose="02040503050406030204" pitchFamily="18" charset="0"/>
+                              </a:rPr>
+                            </m:ctrlPr>
+                          </m:sSubPr>
+                          <m:e>
+                            <m:r>
+                              <a:rPr lang="en-US" i="1">
+                                <a:latin typeface="Cambria Math" panose="02040503050406030204" pitchFamily="18" charset="0"/>
+                              </a:rPr>
+                              <m:t>𝐿</m:t>
+                            </m:r>
+                          </m:e>
+                          <m:sub>
+                            <m:r>
+                              <a:rPr lang="en-US" i="1">
+                                <a:latin typeface="Cambria Math" panose="02040503050406030204" pitchFamily="18" charset="0"/>
+                              </a:rPr>
+                              <m:t>𝑚</m:t>
+                            </m:r>
+                          </m:sub>
+                        </m:sSub>
+                      </m:e>
+                    </m:acc>
+                  </m:oMath>
+                </a14:m>
+                <a:r>
+                  <a:rPr lang="ru-RU" dirty="0"/>
+                  <a:t> – время с момента получения последней </a:t>
+                </a:r>
+                <a:r>
+                  <a:rPr lang="en-US" dirty="0"/>
+                  <a:t>cookie </a:t>
+                </a:r>
+                <a:r>
+                  <a:rPr lang="ru-RU" dirty="0"/>
+                  <a:t>инициатором (сек)</a:t>
+                </a:r>
+                <a:endParaRPr lang="en-US" dirty="0"/>
+              </a:p>
+            </p:txBody>
+          </p:sp>
+        </mc:Choice>
+        <mc:Fallback>
+          <p:sp>
+            <p:nvSpPr>
+              <p:cNvPr id="8" name="TextBox 7">
+                <a:extLst>
+                  <a:ext uri="{FF2B5EF4-FFF2-40B4-BE49-F238E27FC236}">
+                    <a16:creationId xmlns:a16="http://schemas.microsoft.com/office/drawing/2014/main" id="{5AE57290-8DC5-4A61-9F1C-6C50C2F87555}"/>
+                  </a:ext>
+                </a:extLst>
+              </p:cNvPr>
+              <p:cNvSpPr txBox="1">
+                <a:spLocks noRot="1" noChangeAspect="1" noMove="1" noResize="1" noEditPoints="1" noAdjustHandles="1" noChangeArrowheads="1" noChangeShapeType="1" noTextEdit="1"/>
+              </p:cNvSpPr>
+              <p:nvPr/>
+            </p:nvSpPr>
+            <p:spPr>
+              <a:xfrm>
+                <a:off x="148525" y="6213288"/>
+                <a:ext cx="7181390" cy="654666"/>
+              </a:xfrm>
+              <a:prstGeom prst="rect">
+                <a:avLst/>
+              </a:prstGeom>
+              <a:blipFill>
+                <a:blip r:embed="rId5"/>
+                <a:stretch>
+                  <a:fillRect t="-4630" b="-13889"/>
+                </a:stretch>
+              </a:blipFill>
+            </p:spPr>
+            <p:txBody>
+              <a:bodyPr/>
+              <a:lstStyle/>
+              <a:p>
+                <a:r>
+                  <a:rPr lang="ru-RU">
+                    <a:noFill/>
+                  </a:rPr>
+                  <a:t> </a:t>
+                </a:r>
+              </a:p>
+            </p:txBody>
+          </p:sp>
+        </mc:Fallback>
+      </mc:AlternateContent>
     </p:spTree>
     <p:extLst>
       <p:ext uri="{BB962C8B-B14F-4D97-AF65-F5344CB8AC3E}">
@@ -14564,6 +15161,333 @@
           </a:p>
         </p:txBody>
       </p:sp>
+      <mc:AlternateContent xmlns:mc="http://schemas.openxmlformats.org/markup-compatibility/2006">
+        <mc:Choice xmlns:a14="http://schemas.microsoft.com/office/drawing/2010/main" Requires="a14">
+          <p:sp>
+            <p:nvSpPr>
+              <p:cNvPr id="6" name="TextBox 5">
+                <a:extLst>
+                  <a:ext uri="{FF2B5EF4-FFF2-40B4-BE49-F238E27FC236}">
+                    <a16:creationId xmlns:a16="http://schemas.microsoft.com/office/drawing/2014/main" id="{A769AA13-7B06-489D-BEDE-BD226BB14220}"/>
+                  </a:ext>
+                </a:extLst>
+              </p:cNvPr>
+              <p:cNvSpPr txBox="1"/>
+              <p:nvPr/>
+            </p:nvSpPr>
+            <p:spPr>
+              <a:xfrm>
+                <a:off x="0" y="5711735"/>
+                <a:ext cx="6609695" cy="1200329"/>
+              </a:xfrm>
+              <a:prstGeom prst="rect">
+                <a:avLst/>
+              </a:prstGeom>
+              <a:noFill/>
+            </p:spPr>
+            <p:txBody>
+              <a:bodyPr wrap="none" rtlCol="0">
+                <a:spAutoFit/>
+              </a:bodyPr>
+              <a:lstStyle/>
+              <a:p>
+                <a14:m>
+                  <m:oMath xmlns:m="http://schemas.openxmlformats.org/officeDocument/2006/math">
+                    <m:sSub>
+                      <m:sSubPr>
+                        <m:ctrlPr>
+                          <a:rPr lang="en-US" b="0" i="1" smtClean="0">
+                            <a:latin typeface="Cambria Math" panose="02040503050406030204" pitchFamily="18" charset="0"/>
+                          </a:rPr>
+                        </m:ctrlPr>
+                      </m:sSubPr>
+                      <m:e>
+                        <m:r>
+                          <a:rPr lang="en-US" b="0" i="1" smtClean="0">
+                            <a:latin typeface="Cambria Math" panose="02040503050406030204" pitchFamily="18" charset="0"/>
+                          </a:rPr>
+                          <m:t>𝑇</m:t>
+                        </m:r>
+                      </m:e>
+                      <m:sub>
+                        <m:r>
+                          <a:rPr lang="en-US" b="0" i="1" smtClean="0">
+                            <a:latin typeface="Cambria Math" panose="02040503050406030204" pitchFamily="18" charset="0"/>
+                          </a:rPr>
+                          <m:t>𝑖</m:t>
+                        </m:r>
+                      </m:sub>
+                    </m:sSub>
+                    <m:r>
+                      <a:rPr lang="en-US" b="0" i="1" smtClean="0">
+                        <a:latin typeface="Cambria Math" panose="02040503050406030204" pitchFamily="18" charset="0"/>
+                      </a:rPr>
+                      <m:t>,</m:t>
+                    </m:r>
+                    <m:sSub>
+                      <m:sSubPr>
+                        <m:ctrlPr>
+                          <a:rPr lang="en-US" b="0" i="1" smtClean="0">
+                            <a:latin typeface="Cambria Math" panose="02040503050406030204" pitchFamily="18" charset="0"/>
+                          </a:rPr>
+                        </m:ctrlPr>
+                      </m:sSubPr>
+                      <m:e>
+                        <m:r>
+                          <a:rPr lang="en-US" b="0" i="1" smtClean="0">
+                            <a:latin typeface="Cambria Math" panose="02040503050406030204" pitchFamily="18" charset="0"/>
+                          </a:rPr>
+                          <m:t>𝑇</m:t>
+                        </m:r>
+                      </m:e>
+                      <m:sub>
+                        <m:r>
+                          <a:rPr lang="en-US" b="0" i="1" smtClean="0">
+                            <a:latin typeface="Cambria Math" panose="02040503050406030204" pitchFamily="18" charset="0"/>
+                          </a:rPr>
+                          <m:t>𝑟</m:t>
+                        </m:r>
+                      </m:sub>
+                    </m:sSub>
+                  </m:oMath>
+                </a14:m>
+                <a:r>
+                  <a:rPr lang="ru-RU" dirty="0"/>
+                  <a:t> – ключи инициатора и получателя</a:t>
+                </a:r>
+              </a:p>
+              <a:p>
+                <a14:m>
+                  <m:oMath xmlns:m="http://schemas.openxmlformats.org/officeDocument/2006/math">
+                    <m:sSub>
+                      <m:sSubPr>
+                        <m:ctrlPr>
+                          <a:rPr lang="en-US" i="1">
+                            <a:latin typeface="Cambria Math" panose="02040503050406030204" pitchFamily="18" charset="0"/>
+                          </a:rPr>
+                        </m:ctrlPr>
+                      </m:sSubPr>
+                      <m:e>
+                        <m:r>
+                          <a:rPr lang="en-US" b="0" i="1" smtClean="0">
+                            <a:latin typeface="Cambria Math" panose="02040503050406030204" pitchFamily="18" charset="0"/>
+                          </a:rPr>
+                          <m:t>𝑁</m:t>
+                        </m:r>
+                      </m:e>
+                      <m:sub>
+                        <m:r>
+                          <a:rPr lang="en-US" i="1">
+                            <a:latin typeface="Cambria Math" panose="02040503050406030204" pitchFamily="18" charset="0"/>
+                          </a:rPr>
+                          <m:t>𝑖</m:t>
+                        </m:r>
+                      </m:sub>
+                    </m:sSub>
+                    <m:r>
+                      <a:rPr lang="en-US" i="1">
+                        <a:latin typeface="Cambria Math" panose="02040503050406030204" pitchFamily="18" charset="0"/>
+                      </a:rPr>
+                      <m:t>,</m:t>
+                    </m:r>
+                    <m:sSub>
+                      <m:sSubPr>
+                        <m:ctrlPr>
+                          <a:rPr lang="en-US" i="1">
+                            <a:latin typeface="Cambria Math" panose="02040503050406030204" pitchFamily="18" charset="0"/>
+                          </a:rPr>
+                        </m:ctrlPr>
+                      </m:sSubPr>
+                      <m:e>
+                        <m:r>
+                          <a:rPr lang="en-US" b="0" i="1" smtClean="0">
+                            <a:latin typeface="Cambria Math" panose="02040503050406030204" pitchFamily="18" charset="0"/>
+                          </a:rPr>
+                          <m:t>𝑁</m:t>
+                        </m:r>
+                      </m:e>
+                      <m:sub>
+                        <m:r>
+                          <a:rPr lang="en-US" i="1">
+                            <a:latin typeface="Cambria Math" panose="02040503050406030204" pitchFamily="18" charset="0"/>
+                          </a:rPr>
+                          <m:t>𝑟</m:t>
+                        </m:r>
+                      </m:sub>
+                    </m:sSub>
+                  </m:oMath>
+                </a14:m>
+                <a:r>
+                  <a:rPr lang="en-US" dirty="0"/>
+                  <a:t> </a:t>
+                </a:r>
+                <a:r>
+                  <a:rPr lang="ru-RU" dirty="0"/>
+                  <a:t>–</a:t>
+                </a:r>
+                <a:r>
+                  <a:rPr lang="en-US" dirty="0"/>
+                  <a:t> nonce</a:t>
+                </a:r>
+              </a:p>
+              <a:p>
+                <a14:m>
+                  <m:oMath xmlns:m="http://schemas.openxmlformats.org/officeDocument/2006/math">
+                    <m:sSub>
+                      <m:sSubPr>
+                        <m:ctrlPr>
+                          <a:rPr lang="en-US" b="0" i="1" smtClean="0">
+                            <a:latin typeface="Cambria Math" panose="02040503050406030204" pitchFamily="18" charset="0"/>
+                          </a:rPr>
+                        </m:ctrlPr>
+                      </m:sSubPr>
+                      <m:e>
+                        <m:r>
+                          <a:rPr lang="en-US" b="0" i="1" smtClean="0">
+                            <a:latin typeface="Cambria Math" panose="02040503050406030204" pitchFamily="18" charset="0"/>
+                          </a:rPr>
+                          <m:t>𝐸</m:t>
+                        </m:r>
+                      </m:e>
+                      <m:sub>
+                        <m:r>
+                          <a:rPr lang="en-US" b="0" i="1" smtClean="0">
+                            <a:latin typeface="Cambria Math" panose="02040503050406030204" pitchFamily="18" charset="0"/>
+                          </a:rPr>
+                          <m:t>𝑖</m:t>
+                        </m:r>
+                      </m:sub>
+                    </m:sSub>
+                  </m:oMath>
+                </a14:m>
+                <a:r>
+                  <a:rPr lang="en-US" dirty="0"/>
+                  <a:t> </a:t>
+                </a:r>
+                <a:r>
+                  <a:rPr lang="ru-RU" dirty="0"/>
+                  <a:t>–</a:t>
+                </a:r>
+                <a:r>
+                  <a:rPr lang="en-US" dirty="0"/>
+                  <a:t> </a:t>
+                </a:r>
+                <a:r>
+                  <a:rPr lang="ru-RU" dirty="0"/>
+                  <a:t>ключевая пара </a:t>
+                </a:r>
+                <a:r>
+                  <a:rPr lang="en-US" dirty="0"/>
+                  <a:t>(</a:t>
+                </a:r>
+                <a:r>
+                  <a:rPr lang="ru-RU" dirty="0" err="1"/>
+                  <a:t>зануляются</a:t>
+                </a:r>
+                <a:r>
+                  <a:rPr lang="ru-RU" dirty="0"/>
+                  <a:t>)</a:t>
+                </a:r>
+              </a:p>
+              <a:p>
+                <a14:m>
+                  <m:oMath xmlns:m="http://schemas.openxmlformats.org/officeDocument/2006/math">
+                    <m:sSub>
+                      <m:sSubPr>
+                        <m:ctrlPr>
+                          <a:rPr lang="en-US" b="0" i="1" smtClean="0">
+                            <a:latin typeface="Cambria Math" panose="02040503050406030204" pitchFamily="18" charset="0"/>
+                          </a:rPr>
+                        </m:ctrlPr>
+                      </m:sSubPr>
+                      <m:e>
+                        <m:r>
+                          <a:rPr lang="en-US" b="0" i="1" smtClean="0">
+                            <a:latin typeface="Cambria Math" panose="02040503050406030204" pitchFamily="18" charset="0"/>
+                          </a:rPr>
+                          <m:t>𝐶</m:t>
+                        </m:r>
+                      </m:e>
+                      <m:sub>
+                        <m:r>
+                          <a:rPr lang="en-US" b="0" i="1" smtClean="0">
+                            <a:latin typeface="Cambria Math" panose="02040503050406030204" pitchFamily="18" charset="0"/>
+                          </a:rPr>
+                          <m:t>𝑖</m:t>
+                        </m:r>
+                      </m:sub>
+                    </m:sSub>
+                  </m:oMath>
+                </a14:m>
+                <a:r>
+                  <a:rPr lang="ru-RU" dirty="0"/>
+                  <a:t> – результаты вычисления </a:t>
+                </a:r>
+                <a:r>
+                  <a:rPr lang="en-US" dirty="0"/>
+                  <a:t>KDF (symmetric state ck</a:t>
+                </a:r>
+                <a:r>
+                  <a:rPr lang="ru-RU" dirty="0"/>
+                  <a:t>, </a:t>
+                </a:r>
+                <a:r>
+                  <a:rPr lang="ru-RU" dirty="0" err="1"/>
+                  <a:t>зануляются</a:t>
+                </a:r>
+                <a:r>
+                  <a:rPr lang="ru-RU" dirty="0"/>
+                  <a:t>)</a:t>
+                </a:r>
+              </a:p>
+            </p:txBody>
+          </p:sp>
+        </mc:Choice>
+        <mc:Fallback>
+          <p:sp>
+            <p:nvSpPr>
+              <p:cNvPr id="6" name="TextBox 5">
+                <a:extLst>
+                  <a:ext uri="{FF2B5EF4-FFF2-40B4-BE49-F238E27FC236}">
+                    <a16:creationId xmlns:a16="http://schemas.microsoft.com/office/drawing/2014/main" id="{A769AA13-7B06-489D-BEDE-BD226BB14220}"/>
+                  </a:ext>
+                </a:extLst>
+              </p:cNvPr>
+              <p:cNvSpPr txBox="1">
+                <a:spLocks noRot="1" noChangeAspect="1" noMove="1" noResize="1" noEditPoints="1" noAdjustHandles="1" noChangeArrowheads="1" noChangeShapeType="1" noTextEdit="1"/>
+              </p:cNvSpPr>
+              <p:nvPr/>
+            </p:nvSpPr>
+            <p:spPr>
+              <a:xfrm>
+                <a:off x="0" y="5711735"/>
+                <a:ext cx="6609695" cy="1200329"/>
+              </a:xfrm>
+              <a:prstGeom prst="rect">
+                <a:avLst/>
+              </a:prstGeom>
+              <a:blipFill>
+                <a:blip r:embed="rId3"/>
+                <a:stretch>
+                  <a:fillRect t="-3046" b="-7107"/>
+                </a:stretch>
+              </a:blipFill>
+            </p:spPr>
+            <p:txBody>
+              <a:bodyPr/>
+              <a:lstStyle/>
+              <a:p>
+                <a:r>
+                  <a:rPr lang="ru-RU">
+                    <a:noFill/>
+                  </a:rPr>
+                  <a:t> </a:t>
+                </a:r>
+              </a:p>
+            </p:txBody>
+          </p:sp>
+        </mc:Fallback>
+      </mc:AlternateContent>
     </p:spTree>
     <p:extLst>
       <p:ext uri="{BB962C8B-B14F-4D97-AF65-F5344CB8AC3E}">
@@ -14919,12 +15843,6 @@
         <p:txBody>
           <a:bodyPr/>
           <a:lstStyle/>
-          <a:p>
-            <a:r>
-              <a:rPr lang="ru-RU" dirty="0"/>
-              <a:t>Всё ещё в разработке. Текущая версия не рекомендована к использованию в продакшене.</a:t>
-            </a:r>
-          </a:p>
           <a:p>
             <a:r>
               <a:rPr lang="ru-RU" dirty="0"/>
